--- a/semester 2/Big Data/Dampak Perang Iran 2026 terhadap harga minyak.pptx
+++ b/semester 2/Big Data/Dampak Perang Iran 2026 terhadap harga minyak.pptx
@@ -113,6 +113,11 @@
       </a:defRPr>
     </a:lvl9pPr>
   </p:defaultTextStyle>
+  <p:extLst>
+    <p:ext uri="{EFAFB233-063F-42B5-8137-9DF3F51BA10A}">
+      <p15:sldGuideLst xmlns:p15="http://schemas.microsoft.com/office/powerpoint/2012/main"/>
+    </p:ext>
+  </p:extLst>
 </p:presentation>
 </file>
 
@@ -3875,30 +3880,8 @@
               <a:t> Harga </a:t>
             </a:r>
             <a:r>
-              <a:rPr lang="en-ID" sz="5400" b="1" dirty="0" err="1"/>
+              <a:rPr lang="en-ID" sz="5400" b="1"/>
               <a:t>Minyak</a:t>
-            </a:r>
-            <a:br>
-              <a:rPr lang="en-ID" sz="5400" dirty="0"/>
-            </a:br>
-            <a:r>
-              <a:rPr lang="en-ID" sz="2000" dirty="0">
-                <a:solidFill>
-                  <a:schemeClr val="bg1"/>
-                </a:solidFill>
-              </a:rPr>
-              <a:t>d</a:t>
-            </a:r>
-            <a:br>
-              <a:rPr lang="en-ID" sz="5400" dirty="0"/>
-            </a:br>
-            <a:r>
-              <a:rPr lang="en-ID" sz="4400" b="1" i="1" dirty="0"/>
-              <a:t>“</a:t>
-            </a:r>
-            <a:r>
-              <a:rPr lang="en-US" sz="4400" b="1" i="1" dirty="0"/>
-              <a:t>Studi Kasus: Iran War Oil Shock 2026”</a:t>
             </a:r>
             <a:endParaRPr lang="en-ID" sz="5400" b="1" i="1" dirty="0"/>
           </a:p>
@@ -3926,10 +3909,6 @@
           <a:lstStyle/>
           <a:p>
             <a:pPr algn="ctr"/>
-            <a:r>
-              <a:rPr lang="en-US" dirty="0"/>
-              <a:t>250605210001 Adi Cahyono</a:t>
-            </a:r>
             <a:endParaRPr lang="en-ID" dirty="0"/>
           </a:p>
         </p:txBody>
@@ -4083,19 +4062,11 @@
             </a:r>
             <a:r>
               <a:rPr lang="en-ID" dirty="0" err="1"/>
-              <a:t>kunci</a:t>
-            </a:r>
-            <a:r>
-              <a:rPr lang="en-ID" dirty="0"/>
-              <a:t> </a:t>
-            </a:r>
-            <a:r>
-              <a:rPr lang="en-ID" dirty="0" err="1"/>
               <a:t>konflik</a:t>
             </a:r>
             <a:r>
               <a:rPr lang="en-ID" dirty="0"/>
-              <a:t> Iran dan </a:t>
+              <a:t> Iran-Israel dan </a:t>
             </a:r>
             <a:r>
               <a:rPr lang="en-ID" dirty="0" err="1"/>
@@ -4203,72 +4174,6 @@
             </a:pPr>
             <a:r>
               <a:rPr lang="en-ID" dirty="0"/>
-              <a:t>Harga </a:t>
-            </a:r>
-            <a:r>
-              <a:rPr lang="en-ID" dirty="0" err="1"/>
-              <a:t>bensin</a:t>
-            </a:r>
-            <a:r>
-              <a:rPr lang="en-ID" dirty="0"/>
-              <a:t> </a:t>
-            </a:r>
-            <a:r>
-              <a:rPr lang="en-ID" dirty="0" err="1"/>
-              <a:t>konsumen</a:t>
-            </a:r>
-            <a:r>
-              <a:rPr lang="en-ID" dirty="0"/>
-              <a:t> juga </a:t>
-            </a:r>
-            <a:r>
-              <a:rPr lang="en-ID" dirty="0" err="1"/>
-              <a:t>terpengaruh</a:t>
-            </a:r>
-            <a:r>
-              <a:rPr lang="en-ID" dirty="0"/>
-              <a:t> </a:t>
-            </a:r>
-            <a:r>
-              <a:rPr lang="en-ID" dirty="0" err="1"/>
-              <a:t>signifikan</a:t>
-            </a:r>
-            <a:r>
-              <a:rPr lang="en-ID" dirty="0"/>
-              <a:t>, </a:t>
-            </a:r>
-            <a:r>
-              <a:rPr lang="en-ID" dirty="0" err="1"/>
-              <a:t>dengan</a:t>
-            </a:r>
-            <a:r>
-              <a:rPr lang="en-ID" dirty="0"/>
-              <a:t> </a:t>
-            </a:r>
-            <a:r>
-              <a:rPr lang="en-ID" dirty="0" err="1"/>
-              <a:t>variasi</a:t>
-            </a:r>
-            <a:r>
-              <a:rPr lang="en-ID" dirty="0"/>
-              <a:t> regional yang </a:t>
-            </a:r>
-            <a:r>
-              <a:rPr lang="en-ID" dirty="0" err="1"/>
-              <a:t>mencolok</a:t>
-            </a:r>
-            <a:r>
-              <a:rPr lang="en-ID" dirty="0"/>
-              <a:t>.</a:t>
-            </a:r>
-          </a:p>
-          <a:p>
-            <a:pPr marL="457200" indent="-457200">
-              <a:buFont typeface="+mj-lt"/>
-              <a:buAutoNum type="arabicPeriod"/>
-            </a:pPr>
-            <a:r>
-              <a:rPr lang="en-ID" dirty="0"/>
               <a:t>Data </a:t>
             </a:r>
             <a:r>
@@ -4333,7 +4238,15 @@
             </a:r>
             <a:r>
               <a:rPr lang="en-ID" dirty="0"/>
-              <a:t> dan </a:t>
+              <a:t> yang </a:t>
+            </a:r>
+            <a:r>
+              <a:rPr lang="en-ID" dirty="0" err="1"/>
+              <a:t>ada</a:t>
+            </a:r>
+            <a:r>
+              <a:rPr lang="en-ID" dirty="0"/>
+              <a:t> di Timur Tengah (Iran-Israel) dan </a:t>
             </a:r>
             <a:r>
               <a:rPr lang="en-ID" dirty="0" err="1"/>
@@ -4466,15 +4379,7 @@
             </a:r>
             <a:r>
               <a:rPr lang="en-ID" dirty="0"/>
-              <a:t> </a:t>
-            </a:r>
-            <a:r>
-              <a:rPr lang="en-ID" dirty="0" err="1"/>
-              <a:t>geopolitik</a:t>
-            </a:r>
-            <a:r>
-              <a:rPr lang="en-ID" dirty="0"/>
-              <a:t> </a:t>
+              <a:t> Timur Tengah (Iran-Israel) </a:t>
             </a:r>
             <a:r>
               <a:rPr lang="en-ID" dirty="0" err="1"/>
@@ -4641,7 +4546,7 @@
             </a:r>
             <a:r>
               <a:rPr lang="en-ID" dirty="0"/>
-              <a:t> (Brent, WTI) </a:t>
+              <a:t> (Brent dan WTI) </a:t>
             </a:r>
             <a:r>
               <a:rPr lang="en-ID" dirty="0" err="1"/>
